--- a/assets/TCS302/Unit-3/Lecture21_Tree_Terminology_Binary_Trees.pptx
+++ b/assets/TCS302/Unit-3/Lecture21_Tree_Terminology_Binary_Trees.pptx
@@ -124,31 +124,92 @@
 <pc:chgInfo xmlns:a="http://schemas.openxmlformats.org/drawingml/2006/main" xmlns:r="http://schemas.openxmlformats.org/officeDocument/2006/relationships" xmlns:ac="http://schemas.microsoft.com/office/drawing/2013/main/command" xmlns:pc="http://schemas.microsoft.com/office/powerpoint/2013/main/command">
   <pc:docChgLst>
     <pc:chgData name="SC22D012-Manoj Kaushik 2022-PHD-Earth&amp;SpaceScience" userId="78d50035-fc00-4ea2-995b-b881e10649a1" providerId="ADAL" clId="{275C7A75-CDE0-511A-B56E-A781402A3859}"/>
-    <pc:docChg chg="modSld">
-      <pc:chgData name="SC22D012-Manoj Kaushik 2022-PHD-Earth&amp;SpaceScience" userId="78d50035-fc00-4ea2-995b-b881e10649a1" providerId="ADAL" clId="{275C7A75-CDE0-511A-B56E-A781402A3859}" dt="2026-09-01T06:10:06.213" v="26" actId="1036"/>
+    <pc:docChg chg="custSel modSld">
+      <pc:chgData name="SC22D012-Manoj Kaushik 2022-PHD-Earth&amp;SpaceScience" userId="78d50035-fc00-4ea2-995b-b881e10649a1" providerId="ADAL" clId="{275C7A75-CDE0-511A-B56E-A781402A3859}" dt="2026-09-03T09:45:10.483" v="33" actId="478"/>
       <pc:docMkLst>
         <pc:docMk/>
       </pc:docMkLst>
-      <pc:sldChg chg="modSp mod">
-        <pc:chgData name="SC22D012-Manoj Kaushik 2022-PHD-Earth&amp;SpaceScience" userId="78d50035-fc00-4ea2-995b-b881e10649a1" providerId="ADAL" clId="{275C7A75-CDE0-511A-B56E-A781402A3859}" dt="2026-09-01T06:10:06.213" v="26" actId="1036"/>
+      <pc:sldChg chg="delSp mod">
+        <pc:chgData name="SC22D012-Manoj Kaushik 2022-PHD-Earth&amp;SpaceScience" userId="78d50035-fc00-4ea2-995b-b881e10649a1" providerId="ADAL" clId="{275C7A75-CDE0-511A-B56E-A781402A3859}" dt="2026-09-03T09:44:49.110" v="28" actId="478"/>
+        <pc:sldMkLst>
+          <pc:docMk/>
+          <pc:sldMk cId="0" sldId="258"/>
+        </pc:sldMkLst>
+        <pc:spChg chg="del">
+          <ac:chgData name="SC22D012-Manoj Kaushik 2022-PHD-Earth&amp;SpaceScience" userId="78d50035-fc00-4ea2-995b-b881e10649a1" providerId="ADAL" clId="{275C7A75-CDE0-511A-B56E-A781402A3859}" dt="2026-09-03T09:44:49.110" v="28" actId="478"/>
+          <ac:spMkLst>
+            <pc:docMk/>
+            <pc:sldMk cId="0" sldId="258"/>
+            <ac:spMk id="29" creationId="{00000000-0000-0000-0000-000000000000}"/>
+          </ac:spMkLst>
+        </pc:spChg>
+        <pc:spChg chg="del">
+          <ac:chgData name="SC22D012-Manoj Kaushik 2022-PHD-Earth&amp;SpaceScience" userId="78d50035-fc00-4ea2-995b-b881e10649a1" providerId="ADAL" clId="{275C7A75-CDE0-511A-B56E-A781402A3859}" dt="2026-09-03T09:44:47.871" v="27" actId="478"/>
+          <ac:spMkLst>
+            <pc:docMk/>
+            <pc:sldMk cId="0" sldId="258"/>
+            <ac:spMk id="30" creationId="{00000000-0000-0000-0000-000000000000}"/>
+          </ac:spMkLst>
+        </pc:spChg>
+      </pc:sldChg>
+      <pc:sldChg chg="delSp mod">
+        <pc:chgData name="SC22D012-Manoj Kaushik 2022-PHD-Earth&amp;SpaceScience" userId="78d50035-fc00-4ea2-995b-b881e10649a1" providerId="ADAL" clId="{275C7A75-CDE0-511A-B56E-A781402A3859}" dt="2026-09-03T09:44:55.489" v="30" actId="478"/>
+        <pc:sldMkLst>
+          <pc:docMk/>
+          <pc:sldMk cId="0" sldId="260"/>
+        </pc:sldMkLst>
+        <pc:spChg chg="del">
+          <ac:chgData name="SC22D012-Manoj Kaushik 2022-PHD-Earth&amp;SpaceScience" userId="78d50035-fc00-4ea2-995b-b881e10649a1" providerId="ADAL" clId="{275C7A75-CDE0-511A-B56E-A781402A3859}" dt="2026-09-03T09:44:54.272" v="29" actId="478"/>
+          <ac:spMkLst>
+            <pc:docMk/>
+            <pc:sldMk cId="0" sldId="260"/>
+            <ac:spMk id="23" creationId="{00000000-0000-0000-0000-000000000000}"/>
+          </ac:spMkLst>
+        </pc:spChg>
+        <pc:spChg chg="del">
+          <ac:chgData name="SC22D012-Manoj Kaushik 2022-PHD-Earth&amp;SpaceScience" userId="78d50035-fc00-4ea2-995b-b881e10649a1" providerId="ADAL" clId="{275C7A75-CDE0-511A-B56E-A781402A3859}" dt="2026-09-03T09:44:55.489" v="30" actId="478"/>
+          <ac:spMkLst>
+            <pc:docMk/>
+            <pc:sldMk cId="0" sldId="260"/>
+            <ac:spMk id="24" creationId="{00000000-0000-0000-0000-000000000000}"/>
+          </ac:spMkLst>
+        </pc:spChg>
+      </pc:sldChg>
+      <pc:sldChg chg="delSp modSp mod">
+        <pc:chgData name="SC22D012-Manoj Kaushik 2022-PHD-Earth&amp;SpaceScience" userId="78d50035-fc00-4ea2-995b-b881e10649a1" providerId="ADAL" clId="{275C7A75-CDE0-511A-B56E-A781402A3859}" dt="2026-09-03T09:45:04.267" v="32" actId="478"/>
         <pc:sldMkLst>
           <pc:docMk/>
           <pc:sldMk cId="0" sldId="263"/>
         </pc:sldMkLst>
-        <pc:spChg chg="mod">
-          <ac:chgData name="SC22D012-Manoj Kaushik 2022-PHD-Earth&amp;SpaceScience" userId="78d50035-fc00-4ea2-995b-b881e10649a1" providerId="ADAL" clId="{275C7A75-CDE0-511A-B56E-A781402A3859}" dt="2026-09-01T06:10:01.925" v="15" actId="1035"/>
+        <pc:spChg chg="del mod">
+          <ac:chgData name="SC22D012-Manoj Kaushik 2022-PHD-Earth&amp;SpaceScience" userId="78d50035-fc00-4ea2-995b-b881e10649a1" providerId="ADAL" clId="{275C7A75-CDE0-511A-B56E-A781402A3859}" dt="2026-09-03T09:45:03.125" v="31" actId="478"/>
           <ac:spMkLst>
             <pc:docMk/>
             <pc:sldMk cId="0" sldId="263"/>
             <ac:spMk id="14" creationId="{00000000-0000-0000-0000-000000000000}"/>
           </ac:spMkLst>
         </pc:spChg>
-        <pc:spChg chg="mod">
-          <ac:chgData name="SC22D012-Manoj Kaushik 2022-PHD-Earth&amp;SpaceScience" userId="78d50035-fc00-4ea2-995b-b881e10649a1" providerId="ADAL" clId="{275C7A75-CDE0-511A-B56E-A781402A3859}" dt="2026-09-01T06:10:06.213" v="26" actId="1036"/>
+        <pc:spChg chg="del mod">
+          <ac:chgData name="SC22D012-Manoj Kaushik 2022-PHD-Earth&amp;SpaceScience" userId="78d50035-fc00-4ea2-995b-b881e10649a1" providerId="ADAL" clId="{275C7A75-CDE0-511A-B56E-A781402A3859}" dt="2026-09-03T09:45:04.267" v="32" actId="478"/>
           <ac:spMkLst>
             <pc:docMk/>
             <pc:sldMk cId="0" sldId="263"/>
             <ac:spMk id="15" creationId="{00000000-0000-0000-0000-000000000000}"/>
+          </ac:spMkLst>
+        </pc:spChg>
+      </pc:sldChg>
+      <pc:sldChg chg="delSp mod">
+        <pc:chgData name="SC22D012-Manoj Kaushik 2022-PHD-Earth&amp;SpaceScience" userId="78d50035-fc00-4ea2-995b-b881e10649a1" providerId="ADAL" clId="{275C7A75-CDE0-511A-B56E-A781402A3859}" dt="2026-09-03T09:45:10.483" v="33" actId="478"/>
+        <pc:sldMkLst>
+          <pc:docMk/>
+          <pc:sldMk cId="0" sldId="264"/>
+        </pc:sldMkLst>
+        <pc:spChg chg="del">
+          <ac:chgData name="SC22D012-Manoj Kaushik 2022-PHD-Earth&amp;SpaceScience" userId="78d50035-fc00-4ea2-995b-b881e10649a1" providerId="ADAL" clId="{275C7A75-CDE0-511A-B56E-A781402A3859}" dt="2026-09-03T09:45:10.483" v="33" actId="478"/>
+          <ac:spMkLst>
+            <pc:docMk/>
+            <pc:sldMk cId="0" sldId="264"/>
+            <ac:spMk id="7" creationId="{00000000-0000-0000-0000-000000000000}"/>
           </ac:spMkLst>
         </pc:spChg>
       </pc:sldChg>
@@ -4096,90 +4157,6 @@
           </a:p>
         </p:txBody>
       </p:sp>
-      <p:sp>
-        <p:nvSpPr>
-          <p:cNvPr id="29" name="Shape 27"/>
-          <p:cNvSpPr/>
-          <p:nvPr/>
-        </p:nvSpPr>
-        <p:spPr>
-          <a:xfrm>
-            <a:off x="457200" y="4160520"/>
-            <a:ext cx="8229600" cy="502920"/>
-          </a:xfrm>
-          <a:prstGeom prst="roundRect">
-            <a:avLst>
-              <a:gd name="adj" fmla="val 12727"/>
-            </a:avLst>
-          </a:prstGeom>
-          <a:solidFill>
-            <a:srgbClr val="EEF3FB"/>
-          </a:solidFill>
-          <a:ln w="12700">
-            <a:solidFill>
-              <a:srgbClr val="1E2761"/>
-            </a:solidFill>
-            <a:prstDash val="solid"/>
-          </a:ln>
-        </p:spPr>
-        <p:txBody>
-          <a:bodyPr/>
-          <a:lstStyle/>
-          <a:p>
-            <a:endParaRPr lang="en-US"/>
-          </a:p>
-        </p:txBody>
-      </p:sp>
-      <p:sp>
-        <p:nvSpPr>
-          <p:cNvPr id="30" name="Text 28"/>
-          <p:cNvSpPr/>
-          <p:nvPr/>
-        </p:nvSpPr>
-        <p:spPr>
-          <a:xfrm>
-            <a:off x="640080" y="4160520"/>
-            <a:ext cx="7863840" cy="502920"/>
-          </a:xfrm>
-          <a:prstGeom prst="rect">
-            <a:avLst/>
-          </a:prstGeom>
-          <a:noFill/>
-          <a:ln/>
-        </p:spPr>
-        <p:txBody>
-          <a:bodyPr wrap="square" lIns="0" tIns="0" rIns="0" bIns="0" rtlCol="0" anchor="ctr"/>
-          <a:lstStyle/>
-          <a:p>
-            <a:pPr marL="0" indent="0">
-              <a:buNone/>
-            </a:pPr>
-            <a:r>
-              <a:rPr lang="en-US" sz="1200" b="1" dirty="0">
-                <a:solidFill>
-                  <a:srgbClr val="1E2761"/>
-                </a:solidFill>
-                <a:latin typeface="Calibri" pitchFamily="34" charset="0"/>
-                <a:ea typeface="Calibri" pitchFamily="34" charset="-122"/>
-                <a:cs typeface="Calibri" pitchFamily="34" charset="-120"/>
-              </a:rPr>
-              <a:t>ASK   </a:t>
-            </a:r>
-            <a:r>
-              <a:rPr lang="en-US" sz="1250" i="1" dirty="0">
-                <a:solidFill>
-                  <a:srgbClr val="2B2B2B"/>
-                </a:solidFill>
-                <a:latin typeface="Calibri" pitchFamily="34" charset="0"/>
-                <a:ea typeface="Calibri" pitchFamily="34" charset="-122"/>
-                <a:cs typeface="Calibri" pitchFamily="34" charset="-120"/>
-              </a:rPr>
-              <a:t>Is B a leaf? Is A a leaf? Why or why not, in each case?</a:t>
-            </a:r>
-            <a:endParaRPr lang="en-US" sz="1200" dirty="0"/>
-          </a:p>
-        </p:txBody>
-      </p:sp>
     </p:spTree>
   </p:cSld>
   <p:clrMapOvr>
@@ -5995,90 +5972,6 @@
           </a:p>
         </p:txBody>
       </p:sp>
-      <p:sp>
-        <p:nvSpPr>
-          <p:cNvPr id="23" name="Shape 21"/>
-          <p:cNvSpPr/>
-          <p:nvPr/>
-        </p:nvSpPr>
-        <p:spPr>
-          <a:xfrm>
-            <a:off x="457200" y="4206240"/>
-            <a:ext cx="8229600" cy="502920"/>
-          </a:xfrm>
-          <a:prstGeom prst="roundRect">
-            <a:avLst>
-              <a:gd name="adj" fmla="val 12727"/>
-            </a:avLst>
-          </a:prstGeom>
-          <a:solidFill>
-            <a:srgbClr val="EEF3FB"/>
-          </a:solidFill>
-          <a:ln w="12700">
-            <a:solidFill>
-              <a:srgbClr val="1E2761"/>
-            </a:solidFill>
-            <a:prstDash val="solid"/>
-          </a:ln>
-        </p:spPr>
-        <p:txBody>
-          <a:bodyPr/>
-          <a:lstStyle/>
-          <a:p>
-            <a:endParaRPr lang="en-US"/>
-          </a:p>
-        </p:txBody>
-      </p:sp>
-      <p:sp>
-        <p:nvSpPr>
-          <p:cNvPr id="24" name="Text 22"/>
-          <p:cNvSpPr/>
-          <p:nvPr/>
-        </p:nvSpPr>
-        <p:spPr>
-          <a:xfrm>
-            <a:off x="640080" y="4206240"/>
-            <a:ext cx="7863840" cy="502920"/>
-          </a:xfrm>
-          <a:prstGeom prst="rect">
-            <a:avLst/>
-          </a:prstGeom>
-          <a:noFill/>
-          <a:ln/>
-        </p:spPr>
-        <p:txBody>
-          <a:bodyPr wrap="square" lIns="0" tIns="0" rIns="0" bIns="0" rtlCol="0" anchor="ctr"/>
-          <a:lstStyle/>
-          <a:p>
-            <a:pPr marL="0" indent="0">
-              <a:buNone/>
-            </a:pPr>
-            <a:r>
-              <a:rPr lang="en-US" sz="1200" b="1" dirty="0">
-                <a:solidFill>
-                  <a:srgbClr val="1E2761"/>
-                </a:solidFill>
-                <a:latin typeface="Calibri" pitchFamily="34" charset="0"/>
-                <a:ea typeface="Calibri" pitchFamily="34" charset="-122"/>
-                <a:cs typeface="Calibri" pitchFamily="34" charset="-120"/>
-              </a:rPr>
-              <a:t>ASK   </a:t>
-            </a:r>
-            <a:r>
-              <a:rPr lang="en-US" sz="1250" i="1" dirty="0">
-                <a:solidFill>
-                  <a:srgbClr val="2B2B2B"/>
-                </a:solidFill>
-                <a:latin typeface="Calibri" pitchFamily="34" charset="0"/>
-                <a:ea typeface="Calibri" pitchFamily="34" charset="-122"/>
-                <a:cs typeface="Calibri" pitchFamily="34" charset="-120"/>
-              </a:rPr>
-              <a:t>A node has one child. In a binary tree, does it matter whether that child is left or right?</a:t>
-            </a:r>
-            <a:endParaRPr lang="en-US" sz="1200" dirty="0"/>
-          </a:p>
-        </p:txBody>
-      </p:sp>
     </p:spTree>
   </p:cSld>
   <p:clrMapOvr>
@@ -9660,90 +9553,6 @@
               <a:t>Keeps data ordered so searching is faster than a linear scan.</a:t>
             </a:r>
             <a:endParaRPr lang="en-US" sz="1250" dirty="0"/>
-          </a:p>
-        </p:txBody>
-      </p:sp>
-      <p:sp>
-        <p:nvSpPr>
-          <p:cNvPr id="14" name="Shape 12"/>
-          <p:cNvSpPr/>
-          <p:nvPr/>
-        </p:nvSpPr>
-        <p:spPr>
-          <a:xfrm>
-            <a:off x="457200" y="4285208"/>
-            <a:ext cx="8229600" cy="502920"/>
-          </a:xfrm>
-          <a:prstGeom prst="roundRect">
-            <a:avLst>
-              <a:gd name="adj" fmla="val 12727"/>
-            </a:avLst>
-          </a:prstGeom>
-          <a:solidFill>
-            <a:srgbClr val="EEF3FB"/>
-          </a:solidFill>
-          <a:ln w="12700">
-            <a:solidFill>
-              <a:srgbClr val="1E2761"/>
-            </a:solidFill>
-            <a:prstDash val="solid"/>
-          </a:ln>
-        </p:spPr>
-        <p:txBody>
-          <a:bodyPr/>
-          <a:lstStyle/>
-          <a:p>
-            <a:endParaRPr lang="en-US"/>
-          </a:p>
-        </p:txBody>
-      </p:sp>
-      <p:sp>
-        <p:nvSpPr>
-          <p:cNvPr id="15" name="Text 13"/>
-          <p:cNvSpPr/>
-          <p:nvPr/>
-        </p:nvSpPr>
-        <p:spPr>
-          <a:xfrm>
-            <a:off x="640080" y="4285212"/>
-            <a:ext cx="7863840" cy="502920"/>
-          </a:xfrm>
-          <a:prstGeom prst="rect">
-            <a:avLst/>
-          </a:prstGeom>
-          <a:noFill/>
-          <a:ln/>
-        </p:spPr>
-        <p:txBody>
-          <a:bodyPr wrap="square" lIns="0" tIns="0" rIns="0" bIns="0" rtlCol="0" anchor="ctr"/>
-          <a:lstStyle/>
-          <a:p>
-            <a:pPr marL="0" indent="0">
-              <a:buNone/>
-            </a:pPr>
-            <a:r>
-              <a:rPr lang="en-US" sz="1200" b="1" dirty="0">
-                <a:solidFill>
-                  <a:srgbClr val="1E2761"/>
-                </a:solidFill>
-                <a:latin typeface="Calibri" pitchFamily="34" charset="0"/>
-                <a:ea typeface="Calibri" pitchFamily="34" charset="-122"/>
-                <a:cs typeface="Calibri" pitchFamily="34" charset="-120"/>
-              </a:rPr>
-              <a:t>ASK   </a:t>
-            </a:r>
-            <a:r>
-              <a:rPr lang="en-US" sz="1250" i="1" dirty="0">
-                <a:solidFill>
-                  <a:srgbClr val="2B2B2B"/>
-                </a:solidFill>
-                <a:latin typeface="Calibri" pitchFamily="34" charset="0"/>
-                <a:ea typeface="Calibri" pitchFamily="34" charset="-122"/>
-                <a:cs typeface="Calibri" pitchFamily="34" charset="-120"/>
-              </a:rPr>
-              <a:t>Your phone's contact list can be sorted alphabetically for fast lookup. Which upcoming lecture's structure sounds built for exactly that?</a:t>
-            </a:r>
-            <a:endParaRPr lang="en-US" sz="1200" dirty="0"/>
           </a:p>
         </p:txBody>
       </p:sp>
@@ -10066,45 +9875,6 @@
               <a:t>Draw the expression tree for A * (B + C) - D. Give its preorder, inorder, and postorder traversals.</a:t>
             </a:r>
             <a:endParaRPr lang="en-US" sz="1300" dirty="0"/>
-          </a:p>
-        </p:txBody>
-      </p:sp>
-      <p:sp>
-        <p:nvSpPr>
-          <p:cNvPr id="7" name="Text 5"/>
-          <p:cNvSpPr/>
-          <p:nvPr/>
-        </p:nvSpPr>
-        <p:spPr>
-          <a:xfrm>
-            <a:off x="640080" y="4828032"/>
-            <a:ext cx="7863840" cy="256032"/>
-          </a:xfrm>
-          <a:prstGeom prst="rect">
-            <a:avLst/>
-          </a:prstGeom>
-          <a:noFill/>
-          <a:ln/>
-        </p:spPr>
-        <p:txBody>
-          <a:bodyPr wrap="square" lIns="0" tIns="0" rIns="0" bIns="0" rtlCol="0" anchor="ctr"/>
-          <a:lstStyle/>
-          <a:p>
-            <a:pPr marL="0" indent="0">
-              <a:buNone/>
-            </a:pPr>
-            <a:r>
-              <a:rPr lang="en-US" sz="1050" i="1" dirty="0">
-                <a:solidFill>
-                  <a:srgbClr val="CADCFC"/>
-                </a:solidFill>
-                <a:latin typeface="Calibri" pitchFamily="34" charset="0"/>
-                <a:ea typeface="Calibri" pitchFamily="34" charset="-122"/>
-                <a:cs typeface="Calibri" pitchFamily="34" charset="-120"/>
-              </a:rPr>
-              <a:t>Next lecture: complete/extended binary trees, array and linked representations</a:t>
-            </a:r>
-            <a:endParaRPr lang="en-US" sz="1050" dirty="0"/>
           </a:p>
         </p:txBody>
       </p:sp>
